--- a/Presentation.pptx
+++ b/Presentation.pptx
@@ -119,16 +119,40 @@
 </p:presentation>
 </file>
 
-<file path=ppt/revisionInfo.xml><?xml version="1.0" encoding="utf-8"?>
-<p1510:revInfo xmlns:a="http://schemas.openxmlformats.org/drawingml/2006/main" xmlns:r="http://schemas.openxmlformats.org/officeDocument/2006/relationships" xmlns:p1510="http://schemas.microsoft.com/office/powerpoint/2015/10/main">
-  <p1510:revLst>
-    <p1510:client id="{699AED76-FAFB-4B39-8FB1-D0317DBCF86B}" v="9" dt="2024-12-05T15:07:21.160"/>
-  </p1510:revLst>
-</p1510:revInfo>
-</file>
-
 <file path=ppt/changesInfos/changesInfo1.xml><?xml version="1.0" encoding="utf-8"?>
 <pc:chgInfo xmlns:a="http://schemas.openxmlformats.org/drawingml/2006/main" xmlns:r="http://schemas.openxmlformats.org/officeDocument/2006/relationships" xmlns:ac="http://schemas.microsoft.com/office/drawing/2013/main/command" xmlns:pc="http://schemas.microsoft.com/office/powerpoint/2013/main/command">
+  <pc:docChgLst>
+    <pc:chgData name="Amulya Jasti" userId="82e29e3d824155ae" providerId="LiveId" clId="{D99FF435-C8D7-4C9C-96EB-329A835F6279}"/>
+    <pc:docChg chg="custSel modSld">
+      <pc:chgData name="Amulya Jasti" userId="82e29e3d824155ae" providerId="LiveId" clId="{D99FF435-C8D7-4C9C-96EB-329A835F6279}" dt="2025-10-18T19:07:35.069" v="89" actId="20577"/>
+      <pc:docMkLst>
+        <pc:docMk/>
+      </pc:docMkLst>
+      <pc:sldChg chg="modSp mod">
+        <pc:chgData name="Amulya Jasti" userId="82e29e3d824155ae" providerId="LiveId" clId="{D99FF435-C8D7-4C9C-96EB-329A835F6279}" dt="2025-10-18T19:07:35.069" v="89" actId="20577"/>
+        <pc:sldMkLst>
+          <pc:docMk/>
+          <pc:sldMk cId="438941446" sldId="256"/>
+        </pc:sldMkLst>
+        <pc:spChg chg="mod">
+          <ac:chgData name="Amulya Jasti" userId="82e29e3d824155ae" providerId="LiveId" clId="{D99FF435-C8D7-4C9C-96EB-329A835F6279}" dt="2025-10-18T19:07:35.069" v="89" actId="20577"/>
+          <ac:spMkLst>
+            <pc:docMk/>
+            <pc:sldMk cId="438941446" sldId="256"/>
+            <ac:spMk id="2" creationId="{56564307-CCFE-C2DA-C3FA-24841BC51525}"/>
+          </ac:spMkLst>
+        </pc:spChg>
+        <pc:spChg chg="mod">
+          <ac:chgData name="Amulya Jasti" userId="82e29e3d824155ae" providerId="LiveId" clId="{D99FF435-C8D7-4C9C-96EB-329A835F6279}" dt="2025-10-18T19:07:08.398" v="0" actId="20577"/>
+          <ac:spMkLst>
+            <pc:docMk/>
+            <pc:sldMk cId="438941446" sldId="256"/>
+            <ac:spMk id="3" creationId="{B6DC7054-4E10-828A-385E-C28E5C403031}"/>
+          </ac:spMkLst>
+        </pc:spChg>
+      </pc:sldChg>
+    </pc:docChg>
+  </pc:docChgLst>
   <pc:docChgLst>
     <pc:chgData name="Amulya Jasti" userId="82e29e3d824155ae" providerId="LiveId" clId="{699AED76-FAFB-4B39-8FB1-D0317DBCF86B}"/>
     <pc:docChg chg="undo custSel addSld delSld modSld sldOrd">
@@ -142,22 +166,6 @@
           <pc:docMk/>
           <pc:sldMk cId="438941446" sldId="256"/>
         </pc:sldMkLst>
-        <pc:spChg chg="mod">
-          <ac:chgData name="Amulya Jasti" userId="82e29e3d824155ae" providerId="LiveId" clId="{699AED76-FAFB-4B39-8FB1-D0317DBCF86B}" dt="2024-12-05T05:28:39.556" v="228" actId="2711"/>
-          <ac:spMkLst>
-            <pc:docMk/>
-            <pc:sldMk cId="438941446" sldId="256"/>
-            <ac:spMk id="2" creationId="{56564307-CCFE-C2DA-C3FA-24841BC51525}"/>
-          </ac:spMkLst>
-        </pc:spChg>
-        <pc:spChg chg="mod">
-          <ac:chgData name="Amulya Jasti" userId="82e29e3d824155ae" providerId="LiveId" clId="{699AED76-FAFB-4B39-8FB1-D0317DBCF86B}" dt="2024-12-05T05:28:43.836" v="229" actId="2711"/>
-          <ac:spMkLst>
-            <pc:docMk/>
-            <pc:sldMk cId="438941446" sldId="256"/>
-            <ac:spMk id="3" creationId="{B6DC7054-4E10-828A-385E-C28E5C403031}"/>
-          </ac:spMkLst>
-        </pc:spChg>
       </pc:sldChg>
       <pc:sldChg chg="modSp new mod">
         <pc:chgData name="Amulya Jasti" userId="82e29e3d824155ae" providerId="LiveId" clId="{699AED76-FAFB-4B39-8FB1-D0317DBCF86B}" dt="2024-12-05T05:29:28.182" v="235" actId="20577"/>
@@ -165,22 +173,6 @@
           <pc:docMk/>
           <pc:sldMk cId="3365414224" sldId="257"/>
         </pc:sldMkLst>
-        <pc:spChg chg="mod">
-          <ac:chgData name="Amulya Jasti" userId="82e29e3d824155ae" providerId="LiveId" clId="{699AED76-FAFB-4B39-8FB1-D0317DBCF86B}" dt="2024-12-05T05:28:31.980" v="227" actId="2711"/>
-          <ac:spMkLst>
-            <pc:docMk/>
-            <pc:sldMk cId="3365414224" sldId="257"/>
-            <ac:spMk id="2" creationId="{EE712710-7F7D-4BAF-01F3-379B624FF264}"/>
-          </ac:spMkLst>
-        </pc:spChg>
-        <pc:spChg chg="mod">
-          <ac:chgData name="Amulya Jasti" userId="82e29e3d824155ae" providerId="LiveId" clId="{699AED76-FAFB-4B39-8FB1-D0317DBCF86B}" dt="2024-12-05T05:29:28.182" v="235" actId="20577"/>
-          <ac:spMkLst>
-            <pc:docMk/>
-            <pc:sldMk cId="3365414224" sldId="257"/>
-            <ac:spMk id="3" creationId="{8FBF0244-6E5E-24C8-846A-367F1883BBB4}"/>
-          </ac:spMkLst>
-        </pc:spChg>
       </pc:sldChg>
       <pc:sldChg chg="modSp new mod">
         <pc:chgData name="Amulya Jasti" userId="82e29e3d824155ae" providerId="LiveId" clId="{699AED76-FAFB-4B39-8FB1-D0317DBCF86B}" dt="2024-12-05T16:45:07.390" v="1711" actId="20577"/>
@@ -188,22 +180,6 @@
           <pc:docMk/>
           <pc:sldMk cId="2243599850" sldId="258"/>
         </pc:sldMkLst>
-        <pc:spChg chg="mod">
-          <ac:chgData name="Amulya Jasti" userId="82e29e3d824155ae" providerId="LiveId" clId="{699AED76-FAFB-4B39-8FB1-D0317DBCF86B}" dt="2024-12-05T05:30:40.795" v="331" actId="2711"/>
-          <ac:spMkLst>
-            <pc:docMk/>
-            <pc:sldMk cId="2243599850" sldId="258"/>
-            <ac:spMk id="2" creationId="{1C025492-EB98-6E53-2E92-743238EACF4B}"/>
-          </ac:spMkLst>
-        </pc:spChg>
-        <pc:spChg chg="mod">
-          <ac:chgData name="Amulya Jasti" userId="82e29e3d824155ae" providerId="LiveId" clId="{699AED76-FAFB-4B39-8FB1-D0317DBCF86B}" dt="2024-12-05T16:45:07.390" v="1711" actId="20577"/>
-          <ac:spMkLst>
-            <pc:docMk/>
-            <pc:sldMk cId="2243599850" sldId="258"/>
-            <ac:spMk id="3" creationId="{71A9DBAA-A09B-D7C1-2291-D70D22922E34}"/>
-          </ac:spMkLst>
-        </pc:spChg>
       </pc:sldChg>
       <pc:sldChg chg="addSp modSp new mod">
         <pc:chgData name="Amulya Jasti" userId="82e29e3d824155ae" providerId="LiveId" clId="{699AED76-FAFB-4B39-8FB1-D0317DBCF86B}" dt="2024-12-05T14:04:11.426" v="593" actId="1076"/>
@@ -211,30 +187,6 @@
           <pc:docMk/>
           <pc:sldMk cId="1720007585" sldId="259"/>
         </pc:sldMkLst>
-        <pc:spChg chg="mod">
-          <ac:chgData name="Amulya Jasti" userId="82e29e3d824155ae" providerId="LiveId" clId="{699AED76-FAFB-4B39-8FB1-D0317DBCF86B}" dt="2024-12-05T05:32:41.087" v="498" actId="2711"/>
-          <ac:spMkLst>
-            <pc:docMk/>
-            <pc:sldMk cId="1720007585" sldId="259"/>
-            <ac:spMk id="2" creationId="{3206624A-BC53-9717-C487-EDCE136F0C1F}"/>
-          </ac:spMkLst>
-        </pc:spChg>
-        <pc:spChg chg="mod">
-          <ac:chgData name="Amulya Jasti" userId="82e29e3d824155ae" providerId="LiveId" clId="{699AED76-FAFB-4B39-8FB1-D0317DBCF86B}" dt="2024-12-05T05:33:36.687" v="588" actId="15"/>
-          <ac:spMkLst>
-            <pc:docMk/>
-            <pc:sldMk cId="1720007585" sldId="259"/>
-            <ac:spMk id="3" creationId="{0062A467-253C-982C-B642-60E93455862D}"/>
-          </ac:spMkLst>
-        </pc:spChg>
-        <pc:picChg chg="add mod">
-          <ac:chgData name="Amulya Jasti" userId="82e29e3d824155ae" providerId="LiveId" clId="{699AED76-FAFB-4B39-8FB1-D0317DBCF86B}" dt="2024-12-05T14:04:11.426" v="593" actId="1076"/>
-          <ac:picMkLst>
-            <pc:docMk/>
-            <pc:sldMk cId="1720007585" sldId="259"/>
-            <ac:picMk id="5" creationId="{03B01765-5074-24D0-8CD7-5393E7554BF5}"/>
-          </ac:picMkLst>
-        </pc:picChg>
       </pc:sldChg>
       <pc:sldChg chg="modSp new mod ord">
         <pc:chgData name="Amulya Jasti" userId="82e29e3d824155ae" providerId="LiveId" clId="{699AED76-FAFB-4B39-8FB1-D0317DBCF86B}" dt="2024-12-05T14:23:45.210" v="1553" actId="20577"/>
@@ -242,22 +194,6 @@
           <pc:docMk/>
           <pc:sldMk cId="3991349698" sldId="260"/>
         </pc:sldMkLst>
-        <pc:spChg chg="mod">
-          <ac:chgData name="Amulya Jasti" userId="82e29e3d824155ae" providerId="LiveId" clId="{699AED76-FAFB-4B39-8FB1-D0317DBCF86B}" dt="2024-12-05T14:04:27.956" v="605" actId="20577"/>
-          <ac:spMkLst>
-            <pc:docMk/>
-            <pc:sldMk cId="3991349698" sldId="260"/>
-            <ac:spMk id="2" creationId="{CC12B01E-DA83-918F-9770-400EA1DB6321}"/>
-          </ac:spMkLst>
-        </pc:spChg>
-        <pc:spChg chg="mod">
-          <ac:chgData name="Amulya Jasti" userId="82e29e3d824155ae" providerId="LiveId" clId="{699AED76-FAFB-4B39-8FB1-D0317DBCF86B}" dt="2024-12-05T14:23:45.210" v="1553" actId="20577"/>
-          <ac:spMkLst>
-            <pc:docMk/>
-            <pc:sldMk cId="3991349698" sldId="260"/>
-            <ac:spMk id="3" creationId="{D4E77A62-7133-76B5-F536-C67A5AA8F2E0}"/>
-          </ac:spMkLst>
-        </pc:spChg>
       </pc:sldChg>
       <pc:sldChg chg="modSp new mod">
         <pc:chgData name="Amulya Jasti" userId="82e29e3d824155ae" providerId="LiveId" clId="{699AED76-FAFB-4B39-8FB1-D0317DBCF86B}" dt="2024-12-05T15:00:31.446" v="1555" actId="21"/>
@@ -265,22 +201,6 @@
           <pc:docMk/>
           <pc:sldMk cId="3920395960" sldId="261"/>
         </pc:sldMkLst>
-        <pc:spChg chg="mod">
-          <ac:chgData name="Amulya Jasti" userId="82e29e3d824155ae" providerId="LiveId" clId="{699AED76-FAFB-4B39-8FB1-D0317DBCF86B}" dt="2024-12-05T05:33:15.644" v="552" actId="2711"/>
-          <ac:spMkLst>
-            <pc:docMk/>
-            <pc:sldMk cId="3920395960" sldId="261"/>
-            <ac:spMk id="2" creationId="{ED17D2CC-C2F3-5240-E2CC-E5B08A82F89E}"/>
-          </ac:spMkLst>
-        </pc:spChg>
-        <pc:spChg chg="mod">
-          <ac:chgData name="Amulya Jasti" userId="82e29e3d824155ae" providerId="LiveId" clId="{699AED76-FAFB-4B39-8FB1-D0317DBCF86B}" dt="2024-12-05T15:00:31.446" v="1555" actId="21"/>
-          <ac:spMkLst>
-            <pc:docMk/>
-            <pc:sldMk cId="3920395960" sldId="261"/>
-            <ac:spMk id="3" creationId="{FA2222B3-93A5-77BE-E4BE-1FE250A6B072}"/>
-          </ac:spMkLst>
-        </pc:spChg>
       </pc:sldChg>
       <pc:sldChg chg="addSp delSp modSp add mod">
         <pc:chgData name="Amulya Jasti" userId="82e29e3d824155ae" providerId="LiveId" clId="{699AED76-FAFB-4B39-8FB1-D0317DBCF86B}" dt="2024-12-05T14:22:47.392" v="1408" actId="1076"/>
@@ -288,46 +208,6 @@
           <pc:docMk/>
           <pc:sldMk cId="1185308532" sldId="262"/>
         </pc:sldMkLst>
-        <pc:spChg chg="mod">
-          <ac:chgData name="Amulya Jasti" userId="82e29e3d824155ae" providerId="LiveId" clId="{699AED76-FAFB-4B39-8FB1-D0317DBCF86B}" dt="2024-12-05T14:19:12.393" v="1396" actId="20577"/>
-          <ac:spMkLst>
-            <pc:docMk/>
-            <pc:sldMk cId="1185308532" sldId="262"/>
-            <ac:spMk id="2" creationId="{06CC4BCB-47A6-5FD5-6F6D-6B280EAB576C}"/>
-          </ac:spMkLst>
-        </pc:spChg>
-        <pc:spChg chg="del">
-          <ac:chgData name="Amulya Jasti" userId="82e29e3d824155ae" providerId="LiveId" clId="{699AED76-FAFB-4B39-8FB1-D0317DBCF86B}" dt="2024-12-05T14:19:19.480" v="1398" actId="478"/>
-          <ac:spMkLst>
-            <pc:docMk/>
-            <pc:sldMk cId="1185308532" sldId="262"/>
-            <ac:spMk id="3" creationId="{6881FA01-0483-34C4-2740-6A08CF1B9FBA}"/>
-          </ac:spMkLst>
-        </pc:spChg>
-        <pc:spChg chg="add del mod">
-          <ac:chgData name="Amulya Jasti" userId="82e29e3d824155ae" providerId="LiveId" clId="{699AED76-FAFB-4B39-8FB1-D0317DBCF86B}" dt="2024-12-05T14:19:21.810" v="1399" actId="478"/>
-          <ac:spMkLst>
-            <pc:docMk/>
-            <pc:sldMk cId="1185308532" sldId="262"/>
-            <ac:spMk id="6" creationId="{930D0618-DF07-23EE-2066-5813A7162391}"/>
-          </ac:spMkLst>
-        </pc:spChg>
-        <pc:picChg chg="del">
-          <ac:chgData name="Amulya Jasti" userId="82e29e3d824155ae" providerId="LiveId" clId="{699AED76-FAFB-4B39-8FB1-D0317DBCF86B}" dt="2024-12-05T14:19:16.101" v="1397" actId="478"/>
-          <ac:picMkLst>
-            <pc:docMk/>
-            <pc:sldMk cId="1185308532" sldId="262"/>
-            <ac:picMk id="5" creationId="{A298C1D6-F566-557B-231A-5A04364F2BCE}"/>
-          </ac:picMkLst>
-        </pc:picChg>
-        <pc:picChg chg="add mod">
-          <ac:chgData name="Amulya Jasti" userId="82e29e3d824155ae" providerId="LiveId" clId="{699AED76-FAFB-4B39-8FB1-D0317DBCF86B}" dt="2024-12-05T14:22:47.392" v="1408" actId="1076"/>
-          <ac:picMkLst>
-            <pc:docMk/>
-            <pc:sldMk cId="1185308532" sldId="262"/>
-            <ac:picMk id="8" creationId="{D8F2C9C7-31F9-B7DF-C43D-24430955B8B0}"/>
-          </ac:picMkLst>
-        </pc:picChg>
       </pc:sldChg>
       <pc:sldChg chg="new del">
         <pc:chgData name="Amulya Jasti" userId="82e29e3d824155ae" providerId="LiveId" clId="{699AED76-FAFB-4B39-8FB1-D0317DBCF86B}" dt="2024-12-05T14:19:04.413" v="1364" actId="680"/>
@@ -342,14 +222,6 @@
           <pc:docMk/>
           <pc:sldMk cId="3625397823" sldId="262"/>
         </pc:sldMkLst>
-        <pc:spChg chg="mod">
-          <ac:chgData name="Amulya Jasti" userId="82e29e3d824155ae" providerId="LiveId" clId="{699AED76-FAFB-4B39-8FB1-D0317DBCF86B}" dt="2024-12-05T14:18:57.172" v="1361" actId="20577"/>
-          <ac:spMkLst>
-            <pc:docMk/>
-            <pc:sldMk cId="3625397823" sldId="262"/>
-            <ac:spMk id="2" creationId="{0D71597D-D3A0-D9CA-E614-CC1676138063}"/>
-          </ac:spMkLst>
-        </pc:spChg>
       </pc:sldChg>
       <pc:sldChg chg="add del">
         <pc:chgData name="Amulya Jasti" userId="82e29e3d824155ae" providerId="LiveId" clId="{699AED76-FAFB-4B39-8FB1-D0317DBCF86B}" dt="2024-12-05T14:21:18.038" v="1401"/>
@@ -364,30 +236,6 @@
           <pc:docMk/>
           <pc:sldMk cId="2825266939" sldId="263"/>
         </pc:sldMkLst>
-        <pc:spChg chg="mod">
-          <ac:chgData name="Amulya Jasti" userId="82e29e3d824155ae" providerId="LiveId" clId="{699AED76-FAFB-4B39-8FB1-D0317DBCF86B}" dt="2024-12-05T15:07:35.569" v="1596" actId="20577"/>
-          <ac:spMkLst>
-            <pc:docMk/>
-            <pc:sldMk cId="2825266939" sldId="263"/>
-            <ac:spMk id="2" creationId="{FECFA7DC-78BD-A523-108F-71D3B18FA42B}"/>
-          </ac:spMkLst>
-        </pc:spChg>
-        <pc:picChg chg="add mod">
-          <ac:chgData name="Amulya Jasti" userId="82e29e3d824155ae" providerId="LiveId" clId="{699AED76-FAFB-4B39-8FB1-D0317DBCF86B}" dt="2024-12-05T15:07:23.513" v="1561" actId="962"/>
-          <ac:picMkLst>
-            <pc:docMk/>
-            <pc:sldMk cId="2825266939" sldId="263"/>
-            <ac:picMk id="4" creationId="{9B9AFD27-A392-FA29-E3CB-F99FBEEEBBE9}"/>
-          </ac:picMkLst>
-        </pc:picChg>
-        <pc:picChg chg="del">
-          <ac:chgData name="Amulya Jasti" userId="82e29e3d824155ae" providerId="LiveId" clId="{699AED76-FAFB-4B39-8FB1-D0317DBCF86B}" dt="2024-12-05T15:06:37.035" v="1557" actId="478"/>
-          <ac:picMkLst>
-            <pc:docMk/>
-            <pc:sldMk cId="2825266939" sldId="263"/>
-            <ac:picMk id="8" creationId="{87CFC887-043A-0229-5224-B6FDF93971E2}"/>
-          </ac:picMkLst>
-        </pc:picChg>
       </pc:sldChg>
       <pc:sldChg chg="add del">
         <pc:chgData name="Amulya Jasti" userId="82e29e3d824155ae" providerId="LiveId" clId="{699AED76-FAFB-4B39-8FB1-D0317DBCF86B}" dt="2024-12-05T14:21:23.076" v="1403"/>
@@ -548,7 +396,7 @@
           <a:p>
             <a:fld id="{3094BB49-E148-420A-AB10-DBF7EF4ECA11}" type="datetimeFigureOut">
               <a:rPr lang="en-US" smtClean="0"/>
-              <a:t>12/5/2024</a:t>
+              <a:t>10/18/2025</a:t>
             </a:fld>
             <a:endParaRPr lang="en-US"/>
           </a:p>
@@ -746,7 +594,7 @@
           <a:p>
             <a:fld id="{3094BB49-E148-420A-AB10-DBF7EF4ECA11}" type="datetimeFigureOut">
               <a:rPr lang="en-US" smtClean="0"/>
-              <a:t>12/5/2024</a:t>
+              <a:t>10/18/2025</a:t>
             </a:fld>
             <a:endParaRPr lang="en-US"/>
           </a:p>
@@ -954,7 +802,7 @@
           <a:p>
             <a:fld id="{3094BB49-E148-420A-AB10-DBF7EF4ECA11}" type="datetimeFigureOut">
               <a:rPr lang="en-US" smtClean="0"/>
-              <a:t>12/5/2024</a:t>
+              <a:t>10/18/2025</a:t>
             </a:fld>
             <a:endParaRPr lang="en-US"/>
           </a:p>
@@ -1152,7 +1000,7 @@
           <a:p>
             <a:fld id="{3094BB49-E148-420A-AB10-DBF7EF4ECA11}" type="datetimeFigureOut">
               <a:rPr lang="en-US" smtClean="0"/>
-              <a:t>12/5/2024</a:t>
+              <a:t>10/18/2025</a:t>
             </a:fld>
             <a:endParaRPr lang="en-US"/>
           </a:p>
@@ -1427,7 +1275,7 @@
           <a:p>
             <a:fld id="{3094BB49-E148-420A-AB10-DBF7EF4ECA11}" type="datetimeFigureOut">
               <a:rPr lang="en-US" smtClean="0"/>
-              <a:t>12/5/2024</a:t>
+              <a:t>10/18/2025</a:t>
             </a:fld>
             <a:endParaRPr lang="en-US"/>
           </a:p>
@@ -1692,7 +1540,7 @@
           <a:p>
             <a:fld id="{3094BB49-E148-420A-AB10-DBF7EF4ECA11}" type="datetimeFigureOut">
               <a:rPr lang="en-US" smtClean="0"/>
-              <a:t>12/5/2024</a:t>
+              <a:t>10/18/2025</a:t>
             </a:fld>
             <a:endParaRPr lang="en-US"/>
           </a:p>
@@ -2104,7 +1952,7 @@
           <a:p>
             <a:fld id="{3094BB49-E148-420A-AB10-DBF7EF4ECA11}" type="datetimeFigureOut">
               <a:rPr lang="en-US" smtClean="0"/>
-              <a:t>12/5/2024</a:t>
+              <a:t>10/18/2025</a:t>
             </a:fld>
             <a:endParaRPr lang="en-US"/>
           </a:p>
@@ -2245,7 +2093,7 @@
           <a:p>
             <a:fld id="{3094BB49-E148-420A-AB10-DBF7EF4ECA11}" type="datetimeFigureOut">
               <a:rPr lang="en-US" smtClean="0"/>
-              <a:t>12/5/2024</a:t>
+              <a:t>10/18/2025</a:t>
             </a:fld>
             <a:endParaRPr lang="en-US"/>
           </a:p>
@@ -2358,7 +2206,7 @@
           <a:p>
             <a:fld id="{3094BB49-E148-420A-AB10-DBF7EF4ECA11}" type="datetimeFigureOut">
               <a:rPr lang="en-US" smtClean="0"/>
-              <a:t>12/5/2024</a:t>
+              <a:t>10/18/2025</a:t>
             </a:fld>
             <a:endParaRPr lang="en-US"/>
           </a:p>
@@ -2669,7 +2517,7 @@
           <a:p>
             <a:fld id="{3094BB49-E148-420A-AB10-DBF7EF4ECA11}" type="datetimeFigureOut">
               <a:rPr lang="en-US" smtClean="0"/>
-              <a:t>12/5/2024</a:t>
+              <a:t>10/18/2025</a:t>
             </a:fld>
             <a:endParaRPr lang="en-US"/>
           </a:p>
@@ -2957,7 +2805,7 @@
           <a:p>
             <a:fld id="{3094BB49-E148-420A-AB10-DBF7EF4ECA11}" type="datetimeFigureOut">
               <a:rPr lang="en-US" smtClean="0"/>
-              <a:t>12/5/2024</a:t>
+              <a:t>10/18/2025</a:t>
             </a:fld>
             <a:endParaRPr lang="en-US"/>
           </a:p>
@@ -3198,7 +3046,7 @@
           <a:p>
             <a:fld id="{3094BB49-E148-420A-AB10-DBF7EF4ECA11}" type="datetimeFigureOut">
               <a:rPr lang="en-US" smtClean="0"/>
-              <a:t>12/5/2024</a:t>
+              <a:t>10/18/2025</a:t>
             </a:fld>
             <a:endParaRPr lang="en-US"/>
           </a:p>
@@ -3633,14 +3481,16 @@
         </p:nvSpPr>
         <p:spPr/>
         <p:txBody>
-          <a:bodyPr/>
+          <a:bodyPr>
+            <a:normAutofit fontScale="90000"/>
+          </a:bodyPr>
           <a:lstStyle/>
           <a:p>
             <a:r>
               <a:rPr lang="en-US" dirty="0">
                 <a:latin typeface="Century Schoolbook" panose="02040604050505020304" pitchFamily="18" charset="0"/>
               </a:rPr>
-              <a:t>Smart Meters in the UK</a:t>
+              <a:t>Effectiveness of Smart Meters in Bedford and Cambridge</a:t>
             </a:r>
           </a:p>
         </p:txBody>
@@ -3670,19 +3520,7 @@
               <a:rPr lang="en-US" dirty="0">
                 <a:latin typeface="Century Schoolbook" panose="02040604050505020304" pitchFamily="18" charset="0"/>
               </a:rPr>
-              <a:t>Amulya Jasti, </a:t>
-            </a:r>
-            <a:r>
-              <a:rPr lang="en-US" dirty="0" err="1">
-                <a:latin typeface="Century Schoolbook" panose="02040604050505020304" pitchFamily="18" charset="0"/>
-              </a:rPr>
-              <a:t>Sitong</a:t>
-            </a:r>
-            <a:r>
-              <a:rPr lang="en-US" dirty="0">
-                <a:latin typeface="Century Schoolbook" panose="02040604050505020304" pitchFamily="18" charset="0"/>
-              </a:rPr>
-              <a:t> Guo, Helen Liu</a:t>
+              <a:t>Amulya Jasti</a:t>
             </a:r>
           </a:p>
         </p:txBody>
